--- a/InterviewAce_AI_Project_Submission_v2.pptx
+++ b/InterviewAce_AI_Project_Submission_v2.pptx
@@ -13170,8 +13170,9 @@
                 <a:ea typeface="Times New Roman" panose="02020603050405020304"/>
                 <a:cs typeface="Times New Roman" panose="02020603050405020304"/>
                 <a:sym typeface="Times New Roman" panose="02020603050405020304"/>
+                <a:hlinkClick r:id="rId1" tooltip="" action="ppaction://hlinkfile"/>
               </a:rPr>
-              <a:t>https://github.com/Suvasini911/InterviewAce-AI</a:t>
+              <a:t>https://github.com/Suvasini911/InterviewAce-AI.git</a:t>
             </a:r>
             <a:endParaRPr lang="en-US" sz="1800" dirty="0">
               <a:solidFill>
